--- a/cs701/slides/week-09.pptx
+++ b/cs701/slides/week-09.pptx
@@ -5543,7 +5543,7 @@
                   <a:srgbClr val="01AEFD"/>
                 </a:solidFill>
               </a:rPr>
-              <a:t>Type this into AddNumbers.java   -   line 1</a:t>
+              <a:t>Make a new file, AddNumbers.java, and type this in   -   line 1</a:t>
             </a:r>
           </a:p>
         </p:txBody>
@@ -5624,7 +5624,7 @@
                   <a:srgbClr val="DCECEF"/>
                 </a:solidFill>
               </a:rPr>
-              <a:t>Opens the class. Its name must be the file's name without .java - AddNumbers lives in AddNumbers.java - and every other line goes inside its braces.</a:t>
+              <a:t>Opens the class: AddNumbers, the file's name without .java.</a:t>
             </a:r>
           </a:p>
         </p:txBody>
@@ -9963,7 +9963,7 @@
                   <a:srgbClr val="01AEFD"/>
                 </a:solidFill>
               </a:rPr>
-              <a:t>Type this into StringsEqual.java   -   line 1</a:t>
+              <a:t>Make a new file, StringsEqual.java, and type this in   -   line 1</a:t>
             </a:r>
           </a:p>
         </p:txBody>
@@ -10044,7 +10044,7 @@
                   <a:srgbClr val="DCECEF"/>
                 </a:solidFill>
               </a:rPr>
-              <a:t>Opens the class. Its name must be the file's name without .java - StringsEqual lives in StringsEqual.java - and every other line goes inside its braces.</a:t>
+              <a:t>Opens the class: StringsEqual, the file's name without .java.</a:t>
             </a:r>
           </a:p>
         </p:txBody>
@@ -10268,7 +10268,7 @@
                   <a:srgbClr val="01AEFD"/>
                 </a:solidFill>
               </a:rPr>
-              <a:t>Type this into FirstMethod.java   -   line 1</a:t>
+              <a:t>Make a new file, FirstMethod.java, and type this in   -   line 1</a:t>
             </a:r>
           </a:p>
         </p:txBody>
@@ -10349,7 +10349,7 @@
                   <a:srgbClr val="DCECEF"/>
                 </a:solidFill>
               </a:rPr>
-              <a:t>Opens the class. Its name must be the file's name without .java - FirstMethod lives in FirstMethod.java - and every other line goes inside its braces.</a:t>
+              <a:t>Opens the class: FirstMethod, the file's name without .java.</a:t>
             </a:r>
           </a:p>
         </p:txBody>
@@ -12545,7 +12545,7 @@
                   <a:srgbClr val="01AEFD"/>
                 </a:solidFill>
               </a:rPr>
-              <a:t>Type this into ArithmeticOperation.java   -   line 1</a:t>
+              <a:t>Make a new file, ArithmeticOperation.java, and type this in   -   line 1</a:t>
             </a:r>
           </a:p>
         </p:txBody>
@@ -12816,7 +12816,7 @@
                   <a:srgbClr val="DCECEF"/>
                 </a:solidFill>
               </a:rPr>
-              <a:t>Opens the class. Its name must be the file's name without .java - ArithmeticOperation lives in ArithmeticOperation.java - and every other line goes inside its braces.</a:t>
+              <a:t>Opens the class: ArithmeticOperation, the file's name without .java.</a:t>
             </a:r>
           </a:p>
         </p:txBody>
